--- a/sapient-ds-master.pptx
+++ b/sapient-ds-master.pptx
@@ -14,6 +14,10 @@
     <p:sldId id="261" r:id="rId8"/>
     <p:sldId id="262" r:id="rId9"/>
     <p:sldId id="263" r:id="rId10"/>
+    <p:sldId id="265" r:id="rId11"/>
+    <p:sldId id="266" r:id="rId12"/>
+    <p:sldId id="267" r:id="rId13"/>
+    <p:sldId id="268" r:id="rId14"/>
   </p:sldIdLst>
   <p:sldSz cx="12192000" cy="6858000"/>
   <p:notesSz cx="6858000" cy="9144000"/>
@@ -866,7 +870,7 @@
             <a:fld id="{B61BEF0D-F0BB-DE4B-95CE-6DB70DBA9567}" type="datetimeFigureOut">
               <a:rPr lang="en-US" dirty="0"/>
               <a:pPr/>
-              <a:t>8/12/2025</a:t>
+              <a:t>8/15/2025</a:t>
             </a:fld>
             <a:endParaRPr lang="en-US" dirty="0"/>
           </a:p>
@@ -1114,7 +1118,7 @@
             <a:fld id="{B61BEF0D-F0BB-DE4B-95CE-6DB70DBA9567}" type="datetimeFigureOut">
               <a:rPr lang="en-US" dirty="0"/>
               <a:pPr/>
-              <a:t>8/12/2025</a:t>
+              <a:t>8/15/2025</a:t>
             </a:fld>
             <a:endParaRPr lang="en-US" dirty="0"/>
           </a:p>
@@ -1425,7 +1429,7 @@
             <a:fld id="{B61BEF0D-F0BB-DE4B-95CE-6DB70DBA9567}" type="datetimeFigureOut">
               <a:rPr lang="en-US" dirty="0"/>
               <a:pPr/>
-              <a:t>8/12/2025</a:t>
+              <a:t>8/15/2025</a:t>
             </a:fld>
             <a:endParaRPr lang="en-US" dirty="0"/>
           </a:p>
@@ -1755,7 +1759,7 @@
             <a:fld id="{B61BEF0D-F0BB-DE4B-95CE-6DB70DBA9567}" type="datetimeFigureOut">
               <a:rPr lang="en-US" dirty="0"/>
               <a:pPr/>
-              <a:t>8/12/2025</a:t>
+              <a:t>8/15/2025</a:t>
             </a:fld>
             <a:endParaRPr lang="en-US" dirty="0"/>
           </a:p>
@@ -2066,7 +2070,7 @@
             <a:fld id="{B61BEF0D-F0BB-DE4B-95CE-6DB70DBA9567}" type="datetimeFigureOut">
               <a:rPr lang="en-US" dirty="0"/>
               <a:pPr/>
-              <a:t>8/12/2025</a:t>
+              <a:t>8/15/2025</a:t>
             </a:fld>
             <a:endParaRPr lang="en-US" dirty="0"/>
           </a:p>
@@ -2456,7 +2460,7 @@
             <a:fld id="{B61BEF0D-F0BB-DE4B-95CE-6DB70DBA9567}" type="datetimeFigureOut">
               <a:rPr lang="en-US" dirty="0"/>
               <a:pPr/>
-              <a:t>8/12/2025</a:t>
+              <a:t>8/15/2025</a:t>
             </a:fld>
             <a:endParaRPr lang="en-US" dirty="0"/>
           </a:p>
@@ -2622,7 +2626,7 @@
           <a:p>
             <a:fld id="{55C6B4A9-1611-4792-9094-5F34BCA07E0B}" type="datetimeFigureOut">
               <a:rPr lang="en-US" dirty="0"/>
-              <a:t>8/12/2025</a:t>
+              <a:t>8/15/2025</a:t>
             </a:fld>
             <a:endParaRPr lang="en-US" dirty="0"/>
           </a:p>
@@ -2798,7 +2802,7 @@
             <a:fld id="{B61BEF0D-F0BB-DE4B-95CE-6DB70DBA9567}" type="datetimeFigureOut">
               <a:rPr lang="en-US" dirty="0"/>
               <a:pPr/>
-              <a:t>8/12/2025</a:t>
+              <a:t>8/15/2025</a:t>
             </a:fld>
             <a:endParaRPr lang="en-US" dirty="0"/>
           </a:p>
@@ -2964,7 +2968,7 @@
           <a:p>
             <a:fld id="{42A54C80-263E-416B-A8E0-580EDEADCBDC}" type="datetimeFigureOut">
               <a:rPr lang="en-US" dirty="0"/>
-              <a:t>8/12/2025</a:t>
+              <a:t>8/15/2025</a:t>
             </a:fld>
             <a:endParaRPr lang="en-US" dirty="0"/>
           </a:p>
@@ -3207,7 +3211,7 @@
             <a:fld id="{B61BEF0D-F0BB-DE4B-95CE-6DB70DBA9567}" type="datetimeFigureOut">
               <a:rPr lang="en-US" dirty="0"/>
               <a:pPr/>
-              <a:t>8/12/2025</a:t>
+              <a:t>8/15/2025</a:t>
             </a:fld>
             <a:endParaRPr lang="en-US" dirty="0"/>
           </a:p>
@@ -3435,7 +3439,7 @@
           <a:p>
             <a:fld id="{42A54C80-263E-416B-A8E0-580EDEADCBDC}" type="datetimeFigureOut">
               <a:rPr lang="en-US" dirty="0"/>
-              <a:t>8/12/2025</a:t>
+              <a:t>8/15/2025</a:t>
             </a:fld>
             <a:endParaRPr lang="en-US" dirty="0"/>
           </a:p>
@@ -3805,7 +3809,7 @@
             <a:fld id="{B61BEF0D-F0BB-DE4B-95CE-6DB70DBA9567}" type="datetimeFigureOut">
               <a:rPr lang="en-US" dirty="0"/>
               <a:pPr/>
-              <a:t>8/12/2025</a:t>
+              <a:t>8/15/2025</a:t>
             </a:fld>
             <a:endParaRPr lang="en-US" dirty="0"/>
           </a:p>
@@ -3925,7 +3929,7 @@
             <a:fld id="{B61BEF0D-F0BB-DE4B-95CE-6DB70DBA9567}" type="datetimeFigureOut">
               <a:rPr lang="en-US" dirty="0"/>
               <a:pPr/>
-              <a:t>8/12/2025</a:t>
+              <a:t>8/15/2025</a:t>
             </a:fld>
             <a:endParaRPr lang="en-US" dirty="0"/>
           </a:p>
@@ -4017,7 +4021,7 @@
             <a:fld id="{B61BEF0D-F0BB-DE4B-95CE-6DB70DBA9567}" type="datetimeFigureOut">
               <a:rPr lang="en-US" dirty="0"/>
               <a:pPr/>
-              <a:t>8/12/2025</a:t>
+              <a:t>8/15/2025</a:t>
             </a:fld>
             <a:endParaRPr lang="en-US" dirty="0"/>
           </a:p>
@@ -4268,7 +4272,7 @@
           <a:p>
             <a:fld id="{42A54C80-263E-416B-A8E0-580EDEADCBDC}" type="datetimeFigureOut">
               <a:rPr lang="en-US" dirty="0"/>
-              <a:t>8/12/2025</a:t>
+              <a:t>8/15/2025</a:t>
             </a:fld>
             <a:endParaRPr lang="en-US" dirty="0"/>
           </a:p>
@@ -4570,7 +4574,7 @@
             <a:fld id="{B61BEF0D-F0BB-DE4B-95CE-6DB70DBA9567}" type="datetimeFigureOut">
               <a:rPr lang="en-US" dirty="0"/>
               <a:pPr/>
-              <a:t>8/12/2025</a:t>
+              <a:t>8/15/2025</a:t>
             </a:fld>
             <a:endParaRPr lang="en-US" dirty="0"/>
           </a:p>
@@ -5268,7 +5272,7 @@
             <a:fld id="{B61BEF0D-F0BB-DE4B-95CE-6DB70DBA9567}" type="datetimeFigureOut">
               <a:rPr lang="en-US" dirty="0"/>
               <a:pPr/>
-              <a:t>8/12/2025</a:t>
+              <a:t>8/15/2025</a:t>
             </a:fld>
             <a:endParaRPr lang="en-US" dirty="0"/>
           </a:p>
@@ -5857,6 +5861,602 @@
 </p:sld>
 </file>
 
+<file path=ppt/slides/slide10.xml><?xml version="1.0" encoding="utf-8"?>
+<p:sld xmlns:a="http://schemas.openxmlformats.org/drawingml/2006/main" xmlns:r="http://schemas.openxmlformats.org/officeDocument/2006/relationships" xmlns:p="http://schemas.openxmlformats.org/presentationml/2006/main">
+  <p:cSld>
+    <p:spTree>
+      <p:nvGrpSpPr>
+        <p:cNvPr id="1" name=""/>
+        <p:cNvGrpSpPr/>
+        <p:nvPr/>
+      </p:nvGrpSpPr>
+      <p:grpSpPr>
+        <a:xfrm>
+          <a:off x="0" y="0"/>
+          <a:ext cx="0" cy="0"/>
+          <a:chOff x="0" y="0"/>
+          <a:chExt cx="0" cy="0"/>
+        </a:xfrm>
+      </p:grpSpPr>
+      <p:sp>
+        <p:nvSpPr>
+          <p:cNvPr id="2" name="Title 1">
+            <a:extLst>
+              <a:ext uri="{FF2B5EF4-FFF2-40B4-BE49-F238E27FC236}">
+                <a16:creationId xmlns:a16="http://schemas.microsoft.com/office/drawing/2014/main" id="{231A63E1-BE5E-613A-28E1-2861E0793299}"/>
+              </a:ext>
+            </a:extLst>
+          </p:cNvPr>
+          <p:cNvSpPr>
+            <a:spLocks noGrp="1"/>
+          </p:cNvSpPr>
+          <p:nvPr>
+            <p:ph type="title"/>
+          </p:nvPr>
+        </p:nvSpPr>
+        <p:spPr/>
+        <p:txBody>
+          <a:bodyPr/>
+          <a:lstStyle/>
+          <a:p>
+            <a:r>
+              <a:rPr lang="en-IN" dirty="0"/>
+              <a:t>Visualization</a:t>
+            </a:r>
+          </a:p>
+        </p:txBody>
+      </p:sp>
+      <p:sp>
+        <p:nvSpPr>
+          <p:cNvPr id="4" name="Rectangle 1">
+            <a:extLst>
+              <a:ext uri="{FF2B5EF4-FFF2-40B4-BE49-F238E27FC236}">
+                <a16:creationId xmlns:a16="http://schemas.microsoft.com/office/drawing/2014/main" id="{FB4FE836-AAFD-E841-A9A1-646F7A8108B3}"/>
+              </a:ext>
+            </a:extLst>
+          </p:cNvPr>
+          <p:cNvSpPr>
+            <a:spLocks noGrp="1" noChangeArrowheads="1"/>
+          </p:cNvSpPr>
+          <p:nvPr>
+            <p:ph idx="1"/>
+          </p:nvPr>
+        </p:nvSpPr>
+        <p:spPr bwMode="auto">
+          <a:xfrm>
+            <a:off x="677334" y="1614536"/>
+            <a:ext cx="5942652" cy="1179810"/>
+          </a:xfrm>
+          <a:prstGeom prst="rect">
+            <a:avLst/>
+          </a:prstGeom>
+          <a:noFill/>
+          <a:ln>
+            <a:noFill/>
+          </a:ln>
+          <a:effectLst/>
+          <a:extLst>
+            <a:ext uri="{909E8E84-426E-40DD-AFC4-6F175D3DCCD1}">
+              <a14:hiddenFill xmlns:a14="http://schemas.microsoft.com/office/drawing/2010/main">
+                <a:solidFill>
+                  <a:schemeClr val="accent1"/>
+                </a:solidFill>
+              </a14:hiddenFill>
+            </a:ext>
+            <a:ext uri="{91240B29-F687-4F45-9708-019B960494DF}">
+              <a14:hiddenLine xmlns:a14="http://schemas.microsoft.com/office/drawing/2010/main" w="9525">
+                <a:solidFill>
+                  <a:schemeClr val="tx1"/>
+                </a:solidFill>
+                <a:miter lim="800000"/>
+                <a:headEnd/>
+                <a:tailEnd/>
+              </a14:hiddenLine>
+            </a:ext>
+            <a:ext uri="{AF507438-7753-43E0-B8FC-AC1667EBCBE1}">
+              <a14:hiddenEffects xmlns:a14="http://schemas.microsoft.com/office/drawing/2010/main">
+                <a:effectLst>
+                  <a:outerShdw dist="35921" dir="2700000" algn="ctr" rotWithShape="0">
+                    <a:schemeClr val="bg2"/>
+                  </a:outerShdw>
+                </a:effectLst>
+              </a14:hiddenEffects>
+            </a:ext>
+          </a:extLst>
+        </p:spPr>
+        <p:txBody>
+          <a:bodyPr vert="horz" wrap="none" lIns="91440" tIns="45720" rIns="91440" bIns="45720" numCol="1" anchor="ctr" anchorCtr="0" compatLnSpc="1">
+            <a:prstTxWarp prst="textNoShape">
+              <a:avLst/>
+            </a:prstTxWarp>
+            <a:spAutoFit/>
+          </a:bodyPr>
+          <a:lstStyle/>
+          <a:p>
+            <a:pPr marR="0" lvl="0" fontAlgn="base">
+              <a:lnSpc>
+                <a:spcPct val="100000"/>
+              </a:lnSpc>
+              <a:tabLst/>
+            </a:pPr>
+            <a:r>
+              <a:rPr lang="en-US" altLang="en-US" dirty="0"/>
+              <a:t>Transforms raw data → meaningful insights</a:t>
+            </a:r>
+          </a:p>
+          <a:p>
+            <a:pPr marR="0" lvl="0" fontAlgn="base">
+              <a:lnSpc>
+                <a:spcPct val="100000"/>
+              </a:lnSpc>
+              <a:tabLst/>
+            </a:pPr>
+            <a:r>
+              <a:rPr lang="en-US" altLang="en-US" dirty="0"/>
+              <a:t>Identifies trends, patterns, and anomalies quickly</a:t>
+            </a:r>
+          </a:p>
+          <a:p>
+            <a:pPr marR="0" lvl="0" fontAlgn="base">
+              <a:lnSpc>
+                <a:spcPct val="100000"/>
+              </a:lnSpc>
+              <a:tabLst/>
+            </a:pPr>
+            <a:r>
+              <a:rPr lang="en-US" altLang="en-US" dirty="0"/>
+              <a:t>Enhances decision-making with clear communication</a:t>
+            </a:r>
+          </a:p>
+        </p:txBody>
+      </p:sp>
+    </p:spTree>
+    <p:extLst>
+      <p:ext uri="{BB962C8B-B14F-4D97-AF65-F5344CB8AC3E}">
+        <p14:creationId xmlns:p14="http://schemas.microsoft.com/office/powerpoint/2010/main" val="2774234725"/>
+      </p:ext>
+    </p:extLst>
+  </p:cSld>
+  <p:clrMapOvr>
+    <a:masterClrMapping/>
+  </p:clrMapOvr>
+</p:sld>
+</file>
+
+<file path=ppt/slides/slide11.xml><?xml version="1.0" encoding="utf-8"?>
+<p:sld xmlns:a="http://schemas.openxmlformats.org/drawingml/2006/main" xmlns:r="http://schemas.openxmlformats.org/officeDocument/2006/relationships" xmlns:p="http://schemas.openxmlformats.org/presentationml/2006/main">
+  <p:cSld>
+    <p:spTree>
+      <p:nvGrpSpPr>
+        <p:cNvPr id="1" name=""/>
+        <p:cNvGrpSpPr/>
+        <p:nvPr/>
+      </p:nvGrpSpPr>
+      <p:grpSpPr>
+        <a:xfrm>
+          <a:off x="0" y="0"/>
+          <a:ext cx="0" cy="0"/>
+          <a:chOff x="0" y="0"/>
+          <a:chExt cx="0" cy="0"/>
+        </a:xfrm>
+      </p:grpSpPr>
+      <p:sp>
+        <p:nvSpPr>
+          <p:cNvPr id="2" name="Title 1">
+            <a:extLst>
+              <a:ext uri="{FF2B5EF4-FFF2-40B4-BE49-F238E27FC236}">
+                <a16:creationId xmlns:a16="http://schemas.microsoft.com/office/drawing/2014/main" id="{E58CE0D7-45F0-B6AC-CBA0-E796FDE49862}"/>
+              </a:ext>
+            </a:extLst>
+          </p:cNvPr>
+          <p:cNvSpPr>
+            <a:spLocks noGrp="1"/>
+          </p:cNvSpPr>
+          <p:nvPr>
+            <p:ph type="title"/>
+          </p:nvPr>
+        </p:nvSpPr>
+        <p:spPr/>
+        <p:txBody>
+          <a:bodyPr/>
+          <a:lstStyle/>
+          <a:p>
+            <a:r>
+              <a:rPr lang="en-IN" dirty="0"/>
+              <a:t>Matplotlib and Seaborn</a:t>
+            </a:r>
+          </a:p>
+        </p:txBody>
+      </p:sp>
+      <p:sp>
+        <p:nvSpPr>
+          <p:cNvPr id="4" name="Rectangle 1">
+            <a:extLst>
+              <a:ext uri="{FF2B5EF4-FFF2-40B4-BE49-F238E27FC236}">
+                <a16:creationId xmlns:a16="http://schemas.microsoft.com/office/drawing/2014/main" id="{ABB3250C-F094-A535-D7F5-1981DB32797B}"/>
+              </a:ext>
+            </a:extLst>
+          </p:cNvPr>
+          <p:cNvSpPr>
+            <a:spLocks noGrp="1" noChangeArrowheads="1"/>
+          </p:cNvSpPr>
+          <p:nvPr>
+            <p:ph idx="1"/>
+          </p:nvPr>
+        </p:nvSpPr>
+        <p:spPr bwMode="auto">
+          <a:xfrm>
+            <a:off x="677334" y="1543114"/>
+            <a:ext cx="7109639" cy="774571"/>
+          </a:xfrm>
+          <a:prstGeom prst="rect">
+            <a:avLst/>
+          </a:prstGeom>
+          <a:noFill/>
+          <a:ln>
+            <a:noFill/>
+          </a:ln>
+          <a:effectLst/>
+          <a:extLst>
+            <a:ext uri="{909E8E84-426E-40DD-AFC4-6F175D3DCCD1}">
+              <a14:hiddenFill xmlns:a14="http://schemas.microsoft.com/office/drawing/2010/main">
+                <a:solidFill>
+                  <a:schemeClr val="accent1"/>
+                </a:solidFill>
+              </a14:hiddenFill>
+            </a:ext>
+            <a:ext uri="{91240B29-F687-4F45-9708-019B960494DF}">
+              <a14:hiddenLine xmlns:a14="http://schemas.microsoft.com/office/drawing/2010/main" w="9525">
+                <a:solidFill>
+                  <a:schemeClr val="tx1"/>
+                </a:solidFill>
+                <a:miter lim="800000"/>
+                <a:headEnd/>
+                <a:tailEnd/>
+              </a14:hiddenLine>
+            </a:ext>
+            <a:ext uri="{AF507438-7753-43E0-B8FC-AC1667EBCBE1}">
+              <a14:hiddenEffects xmlns:a14="http://schemas.microsoft.com/office/drawing/2010/main">
+                <a:effectLst>
+                  <a:outerShdw dist="35921" dir="2700000" algn="ctr" rotWithShape="0">
+                    <a:schemeClr val="bg2"/>
+                  </a:outerShdw>
+                </a:effectLst>
+              </a14:hiddenEffects>
+            </a:ext>
+          </a:extLst>
+        </p:spPr>
+        <p:txBody>
+          <a:bodyPr vert="horz" wrap="none" lIns="91440" tIns="45720" rIns="91440" bIns="45720" numCol="1" anchor="ctr" anchorCtr="0" compatLnSpc="1">
+            <a:prstTxWarp prst="textNoShape">
+              <a:avLst/>
+            </a:prstTxWarp>
+            <a:spAutoFit/>
+          </a:bodyPr>
+          <a:lstStyle/>
+          <a:p>
+            <a:pPr fontAlgn="base"/>
+            <a:r>
+              <a:rPr lang="en-US" altLang="en-US" dirty="0"/>
+              <a:t>Matplotlib → Foundation, customizable static plots</a:t>
+            </a:r>
+          </a:p>
+          <a:p>
+            <a:pPr fontAlgn="base"/>
+            <a:r>
+              <a:rPr lang="en-US" altLang="en-US" dirty="0"/>
+              <a:t>Seaborn → High-level, aesthetically pleasing statistical graphics</a:t>
+            </a:r>
+          </a:p>
+        </p:txBody>
+      </p:sp>
+    </p:spTree>
+    <p:extLst>
+      <p:ext uri="{BB962C8B-B14F-4D97-AF65-F5344CB8AC3E}">
+        <p14:creationId xmlns:p14="http://schemas.microsoft.com/office/powerpoint/2010/main" val="1821238369"/>
+      </p:ext>
+    </p:extLst>
+  </p:cSld>
+  <p:clrMapOvr>
+    <a:masterClrMapping/>
+  </p:clrMapOvr>
+</p:sld>
+</file>
+
+<file path=ppt/slides/slide12.xml><?xml version="1.0" encoding="utf-8"?>
+<p:sld xmlns:a="http://schemas.openxmlformats.org/drawingml/2006/main" xmlns:r="http://schemas.openxmlformats.org/officeDocument/2006/relationships" xmlns:p="http://schemas.openxmlformats.org/presentationml/2006/main">
+  <p:cSld>
+    <p:spTree>
+      <p:nvGrpSpPr>
+        <p:cNvPr id="1" name=""/>
+        <p:cNvGrpSpPr/>
+        <p:nvPr/>
+      </p:nvGrpSpPr>
+      <p:grpSpPr>
+        <a:xfrm>
+          <a:off x="0" y="0"/>
+          <a:ext cx="0" cy="0"/>
+          <a:chOff x="0" y="0"/>
+          <a:chExt cx="0" cy="0"/>
+        </a:xfrm>
+      </p:grpSpPr>
+      <p:sp>
+        <p:nvSpPr>
+          <p:cNvPr id="2" name="Title 1">
+            <a:extLst>
+              <a:ext uri="{FF2B5EF4-FFF2-40B4-BE49-F238E27FC236}">
+                <a16:creationId xmlns:a16="http://schemas.microsoft.com/office/drawing/2014/main" id="{144D5903-F164-6678-9C64-6584994A00E4}"/>
+              </a:ext>
+            </a:extLst>
+          </p:cNvPr>
+          <p:cNvSpPr>
+            <a:spLocks noGrp="1"/>
+          </p:cNvSpPr>
+          <p:nvPr>
+            <p:ph type="title"/>
+          </p:nvPr>
+        </p:nvSpPr>
+        <p:spPr/>
+        <p:txBody>
+          <a:bodyPr/>
+          <a:lstStyle/>
+          <a:p>
+            <a:r>
+              <a:rPr lang="en-IN" dirty="0"/>
+              <a:t>Interactive Dashboards</a:t>
+            </a:r>
+          </a:p>
+        </p:txBody>
+      </p:sp>
+      <p:sp>
+        <p:nvSpPr>
+          <p:cNvPr id="4" name="Rectangle 1">
+            <a:extLst>
+              <a:ext uri="{FF2B5EF4-FFF2-40B4-BE49-F238E27FC236}">
+                <a16:creationId xmlns:a16="http://schemas.microsoft.com/office/drawing/2014/main" id="{7FAC0F95-487F-EECF-BEDE-616FDC40D409}"/>
+              </a:ext>
+            </a:extLst>
+          </p:cNvPr>
+          <p:cNvSpPr>
+            <a:spLocks noGrp="1" noChangeArrowheads="1"/>
+          </p:cNvSpPr>
+          <p:nvPr>
+            <p:ph idx="1"/>
+          </p:nvPr>
+        </p:nvSpPr>
+        <p:spPr bwMode="auto">
+          <a:xfrm>
+            <a:off x="736601" y="1340495"/>
+            <a:ext cx="5289012" cy="1179810"/>
+          </a:xfrm>
+          <a:prstGeom prst="rect">
+            <a:avLst/>
+          </a:prstGeom>
+          <a:noFill/>
+          <a:ln>
+            <a:noFill/>
+          </a:ln>
+          <a:effectLst/>
+          <a:extLst>
+            <a:ext uri="{909E8E84-426E-40DD-AFC4-6F175D3DCCD1}">
+              <a14:hiddenFill xmlns:a14="http://schemas.microsoft.com/office/drawing/2010/main">
+                <a:solidFill>
+                  <a:schemeClr val="accent1"/>
+                </a:solidFill>
+              </a14:hiddenFill>
+            </a:ext>
+            <a:ext uri="{91240B29-F687-4F45-9708-019B960494DF}">
+              <a14:hiddenLine xmlns:a14="http://schemas.microsoft.com/office/drawing/2010/main" w="9525">
+                <a:solidFill>
+                  <a:schemeClr val="tx1"/>
+                </a:solidFill>
+                <a:miter lim="800000"/>
+                <a:headEnd/>
+                <a:tailEnd/>
+              </a14:hiddenLine>
+            </a:ext>
+            <a:ext uri="{AF507438-7753-43E0-B8FC-AC1667EBCBE1}">
+              <a14:hiddenEffects xmlns:a14="http://schemas.microsoft.com/office/drawing/2010/main">
+                <a:effectLst>
+                  <a:outerShdw dist="35921" dir="2700000" algn="ctr" rotWithShape="0">
+                    <a:schemeClr val="bg2"/>
+                  </a:outerShdw>
+                </a:effectLst>
+              </a14:hiddenEffects>
+            </a:ext>
+          </a:extLst>
+        </p:spPr>
+        <p:txBody>
+          <a:bodyPr vert="horz" wrap="none" lIns="91440" tIns="45720" rIns="91440" bIns="45720" numCol="1" anchor="ctr" anchorCtr="0" compatLnSpc="1">
+            <a:prstTxWarp prst="textNoShape">
+              <a:avLst/>
+            </a:prstTxWarp>
+            <a:spAutoFit/>
+          </a:bodyPr>
+          <a:lstStyle/>
+          <a:p>
+            <a:pPr marR="0" lvl="0" fontAlgn="base">
+              <a:lnSpc>
+                <a:spcPct val="100000"/>
+              </a:lnSpc>
+              <a:tabLst/>
+            </a:pPr>
+            <a:r>
+              <a:rPr lang="en-US" altLang="en-US" dirty="0"/>
+              <a:t>Enable dynamic exploration of data</a:t>
+            </a:r>
+          </a:p>
+          <a:p>
+            <a:pPr marR="0" lvl="0" fontAlgn="base">
+              <a:lnSpc>
+                <a:spcPct val="100000"/>
+              </a:lnSpc>
+              <a:tabLst/>
+            </a:pPr>
+            <a:r>
+              <a:rPr lang="en-US" altLang="en-US" dirty="0"/>
+              <a:t>Provide filters, drill-downs, real-time updates</a:t>
+            </a:r>
+          </a:p>
+          <a:p>
+            <a:pPr marR="0" lvl="0" fontAlgn="base">
+              <a:lnSpc>
+                <a:spcPct val="100000"/>
+              </a:lnSpc>
+              <a:tabLst/>
+            </a:pPr>
+            <a:r>
+              <a:rPr lang="en-US" altLang="en-US" dirty="0"/>
+              <a:t>Useful for stakeholders &amp; business reporting</a:t>
+            </a:r>
+          </a:p>
+        </p:txBody>
+      </p:sp>
+      <p:sp>
+        <p:nvSpPr>
+          <p:cNvPr id="6" name="TextBox 5">
+            <a:extLst>
+              <a:ext uri="{FF2B5EF4-FFF2-40B4-BE49-F238E27FC236}">
+                <a16:creationId xmlns:a16="http://schemas.microsoft.com/office/drawing/2014/main" id="{5D9B3B65-71BE-874C-16C3-88E235853593}"/>
+              </a:ext>
+            </a:extLst>
+          </p:cNvPr>
+          <p:cNvSpPr txBox="1"/>
+          <p:nvPr/>
+        </p:nvSpPr>
+        <p:spPr>
+          <a:xfrm>
+            <a:off x="2491317" y="2864535"/>
+            <a:ext cx="6100232" cy="646331"/>
+          </a:xfrm>
+          <a:prstGeom prst="rect">
+            <a:avLst/>
+          </a:prstGeom>
+          <a:noFill/>
+        </p:spPr>
+        <p:txBody>
+          <a:bodyPr wrap="square">
+            <a:spAutoFit/>
+          </a:bodyPr>
+          <a:lstStyle/>
+          <a:p>
+            <a:r>
+              <a:rPr lang="en-US" dirty="0"/>
+              <a:t>Panel → Easy creation of interactive dashboards in Python(Also: </a:t>
+            </a:r>
+            <a:r>
+              <a:rPr lang="en-US" dirty="0" err="1"/>
+              <a:t>Plotly</a:t>
+            </a:r>
+            <a:r>
+              <a:rPr lang="en-US" dirty="0"/>
+              <a:t> Dash, </a:t>
+            </a:r>
+            <a:r>
+              <a:rPr lang="en-US" dirty="0" err="1"/>
+              <a:t>Streamlit</a:t>
+            </a:r>
+            <a:r>
+              <a:rPr lang="en-US" dirty="0"/>
+              <a:t>, Voila)</a:t>
+            </a:r>
+            <a:endParaRPr lang="en-IN" dirty="0"/>
+          </a:p>
+        </p:txBody>
+      </p:sp>
+    </p:spTree>
+    <p:extLst>
+      <p:ext uri="{BB962C8B-B14F-4D97-AF65-F5344CB8AC3E}">
+        <p14:creationId xmlns:p14="http://schemas.microsoft.com/office/powerpoint/2010/main" val="3958745218"/>
+      </p:ext>
+    </p:extLst>
+  </p:cSld>
+  <p:clrMapOvr>
+    <a:masterClrMapping/>
+  </p:clrMapOvr>
+</p:sld>
+</file>
+
+<file path=ppt/slides/slide13.xml><?xml version="1.0" encoding="utf-8"?>
+<p:sld xmlns:a="http://schemas.openxmlformats.org/drawingml/2006/main" xmlns:r="http://schemas.openxmlformats.org/officeDocument/2006/relationships" xmlns:p="http://schemas.openxmlformats.org/presentationml/2006/main">
+  <p:cSld>
+    <p:spTree>
+      <p:nvGrpSpPr>
+        <p:cNvPr id="1" name=""/>
+        <p:cNvGrpSpPr/>
+        <p:nvPr/>
+      </p:nvGrpSpPr>
+      <p:grpSpPr>
+        <a:xfrm>
+          <a:off x="0" y="0"/>
+          <a:ext cx="0" cy="0"/>
+          <a:chOff x="0" y="0"/>
+          <a:chExt cx="0" cy="0"/>
+        </a:xfrm>
+      </p:grpSpPr>
+      <p:sp>
+        <p:nvSpPr>
+          <p:cNvPr id="2" name="Title 1">
+            <a:extLst>
+              <a:ext uri="{FF2B5EF4-FFF2-40B4-BE49-F238E27FC236}">
+                <a16:creationId xmlns:a16="http://schemas.microsoft.com/office/drawing/2014/main" id="{BFE03C92-AC11-187A-C73C-9FDD2B3EF5C8}"/>
+              </a:ext>
+            </a:extLst>
+          </p:cNvPr>
+          <p:cNvSpPr>
+            <a:spLocks noGrp="1"/>
+          </p:cNvSpPr>
+          <p:nvPr>
+            <p:ph type="title"/>
+          </p:nvPr>
+        </p:nvSpPr>
+        <p:spPr/>
+        <p:txBody>
+          <a:bodyPr/>
+          <a:lstStyle/>
+          <a:p>
+            <a:endParaRPr lang="en-IN"/>
+          </a:p>
+        </p:txBody>
+      </p:sp>
+      <p:sp>
+        <p:nvSpPr>
+          <p:cNvPr id="3" name="Content Placeholder 2">
+            <a:extLst>
+              <a:ext uri="{FF2B5EF4-FFF2-40B4-BE49-F238E27FC236}">
+                <a16:creationId xmlns:a16="http://schemas.microsoft.com/office/drawing/2014/main" id="{D32B31F7-C279-19CA-9CE0-F9846922B699}"/>
+              </a:ext>
+            </a:extLst>
+          </p:cNvPr>
+          <p:cNvSpPr>
+            <a:spLocks noGrp="1"/>
+          </p:cNvSpPr>
+          <p:nvPr>
+            <p:ph idx="1"/>
+          </p:nvPr>
+        </p:nvSpPr>
+        <p:spPr/>
+        <p:txBody>
+          <a:bodyPr/>
+          <a:lstStyle/>
+          <a:p>
+            <a:endParaRPr lang="en-IN"/>
+          </a:p>
+        </p:txBody>
+      </p:sp>
+    </p:spTree>
+    <p:extLst>
+      <p:ext uri="{BB962C8B-B14F-4D97-AF65-F5344CB8AC3E}">
+        <p14:creationId xmlns:p14="http://schemas.microsoft.com/office/powerpoint/2010/main" val="1736452347"/>
+      </p:ext>
+    </p:extLst>
+  </p:cSld>
+  <p:clrMapOvr>
+    <a:masterClrMapping/>
+  </p:clrMapOvr>
+</p:sld>
+</file>
+
 <file path=ppt/slides/slide2.xml><?xml version="1.0" encoding="utf-8"?>
 <p:sld xmlns:a="http://schemas.openxmlformats.org/drawingml/2006/main" xmlns:r="http://schemas.openxmlformats.org/officeDocument/2006/relationships" xmlns:p="http://schemas.openxmlformats.org/presentationml/2006/main">
   <p:cSld>
